--- a/13-ds-algebra-lineal/26-Modelos-personalizados.pptx
+++ b/13-ds-algebra-lineal/26-Modelos-personalizados.pptx
@@ -980,7 +980,7 @@
                 <a:tab algn="l" pos="0"/>
               </a:tabLst>
             </a:pPr>
-            <a:fld id="{0FFF4B13-87AB-4509-A335-630B8AAB77D0}" type="slidenum">
+            <a:fld id="{8BF911DF-4C8C-4614-BE5B-3CB4B750BCE5}" type="slidenum">
               <a:rPr b="0" lang="en" sz="1000" strike="noStrike" u="none">
                 <a:solidFill>
                   <a:schemeClr val="dk2"/>
@@ -1089,7 +1089,7 @@
                 <a:tab algn="l" pos="0"/>
               </a:tabLst>
             </a:pPr>
-            <a:fld id="{D52641B1-B89F-440C-A306-4FA3F4D3E853}" type="slidenum">
+            <a:fld id="{0732D14E-6A4D-47F5-88CF-BDD98275375C}" type="slidenum">
               <a:rPr b="0" lang="en" sz="1000" strike="noStrike" u="none">
                 <a:solidFill>
                   <a:schemeClr val="dk2"/>
@@ -2079,7 +2079,7 @@
                 <a:tab algn="l" pos="0"/>
               </a:tabLst>
             </a:pPr>
-            <a:fld id="{75F996F9-4F5E-483D-9560-CAAF54521B74}" type="slidenum">
+            <a:fld id="{CBB805EF-0F8E-407F-9DED-0812713C8C64}" type="slidenum">
               <a:rPr b="0" lang="en" sz="1000" strike="noStrike" u="none">
                 <a:solidFill>
                   <a:schemeClr val="dk2"/>
@@ -3069,7 +3069,7 @@
                 <a:tab algn="l" pos="0"/>
               </a:tabLst>
             </a:pPr>
-            <a:fld id="{51C1F489-D016-41AD-A73A-BC9C5EEB14F8}" type="slidenum">
+            <a:fld id="{38EC336F-3E83-4810-B107-23AF32CD216E}" type="slidenum">
               <a:rPr b="0" lang="en" sz="1000" strike="noStrike" u="none">
                 <a:solidFill>
                   <a:schemeClr val="dk2"/>
@@ -4059,7 +4059,7 @@
                 <a:tab algn="l" pos="0"/>
               </a:tabLst>
             </a:pPr>
-            <a:fld id="{D8104D7C-5F5D-43B6-BAC1-10920F0F44D4}" type="slidenum">
+            <a:fld id="{DE51B195-06AA-4810-8571-A66DC4208AA3}" type="slidenum">
               <a:rPr b="0" lang="en" sz="1000" strike="noStrike" u="none">
                 <a:solidFill>
                   <a:schemeClr val="dk2"/>
@@ -4775,7 +4775,7 @@
                 <a:tab algn="l" pos="0"/>
               </a:tabLst>
             </a:pPr>
-            <a:fld id="{6C684E90-6B1D-4E69-983C-A5D860FF4B24}" type="slidenum">
+            <a:fld id="{90D4510A-CDF6-427C-9E90-1CEE4C984DEE}" type="slidenum">
               <a:rPr b="0" lang="en" sz="1000" strike="noStrike" u="none">
                 <a:solidFill>
                   <a:schemeClr val="dk2"/>
@@ -6039,7 +6039,7 @@
                 <a:tab algn="l" pos="0"/>
               </a:tabLst>
             </a:pPr>
-            <a:fld id="{3C45E0E4-9619-42EA-8B9A-C0094572B2FA}" type="slidenum">
+            <a:fld id="{A5CC1B66-DAAE-4D08-9A55-FC70F2E9DB60}" type="slidenum">
               <a:rPr b="0" lang="en" sz="1000" strike="noStrike" u="none">
                 <a:solidFill>
                   <a:schemeClr val="dk2"/>
@@ -7851,7 +7851,7 @@
                 <a:tab algn="l" pos="0"/>
               </a:tabLst>
             </a:pPr>
-            <a:fld id="{C5E9DA1F-43FF-4265-8DBF-31542C3C5439}" type="slidenum">
+            <a:fld id="{3A4D5110-378B-4A6C-A714-07CDB6D16834}" type="slidenum">
               <a:rPr b="0" lang="en" sz="1000" strike="noStrike" u="none">
                 <a:solidFill>
                   <a:schemeClr val="dk2"/>
@@ -7960,7 +7960,7 @@
                 <a:tab algn="l" pos="0"/>
               </a:tabLst>
             </a:pPr>
-            <a:fld id="{1A30C421-5485-4D2A-98FA-A3C3D182CDFC}" type="slidenum">
+            <a:fld id="{037BF812-CDE7-4B43-B2CA-5A2B01383792}" type="slidenum">
               <a:rPr b="0" lang="en" sz="1000" strike="noStrike" u="none">
                 <a:solidFill>
                   <a:schemeClr val="dk2"/>
@@ -8461,7 +8461,7 @@
                 <a:tab algn="l" pos="0"/>
               </a:tabLst>
             </a:pPr>
-            <a:fld id="{0D3838BE-36A8-4A4F-B632-CBD5DEC84C7D}" type="slidenum">
+            <a:fld id="{41CD2B0E-9A03-4789-B490-C194881DE1B7}" type="slidenum">
               <a:rPr b="0" lang="en" sz="1000" strike="noStrike" u="none">
                 <a:solidFill>
                   <a:schemeClr val="dk2"/>
@@ -8903,7 +8903,7 @@
                 <a:tab algn="l" pos="0"/>
               </a:tabLst>
             </a:pPr>
-            <a:fld id="{40660C2B-FAAA-4B87-BC2B-38BFBA969F05}" type="slidenum">
+            <a:fld id="{04CCE1CA-66E2-4BF7-90EA-8916F0DD776C}" type="slidenum">
               <a:rPr b="0" lang="en" sz="1000" strike="noStrike" u="none">
                 <a:solidFill>
                   <a:schemeClr val="dk2"/>
@@ -9619,7 +9619,7 @@
                 <a:tab algn="l" pos="0"/>
               </a:tabLst>
             </a:pPr>
-            <a:fld id="{EFF3CC3A-738B-4484-A03E-4A567AC83E42}" type="slidenum">
+            <a:fld id="{8B8C6F9C-30FC-4A2A-93D8-EDBD903B906B}" type="slidenum">
               <a:rPr b="0" lang="en" sz="1000" strike="noStrike" u="none">
                 <a:solidFill>
                   <a:schemeClr val="dk2"/>
@@ -10335,7 +10335,7 @@
                 <a:tab algn="l" pos="0"/>
               </a:tabLst>
             </a:pPr>
-            <a:fld id="{E2D93F82-FE74-4A73-9D42-D0B2EA5A62F1}" type="slidenum">
+            <a:fld id="{DE0FF70B-4558-4856-B043-0CEE9B01C7C2}" type="slidenum">
               <a:rPr b="0" lang="en" sz="1000" strike="noStrike" u="none">
                 <a:solidFill>
                   <a:schemeClr val="dk2"/>
@@ -10503,7 +10503,7 @@
                 <a:tab algn="l" pos="0"/>
               </a:tabLst>
             </a:pPr>
-            <a:fld id="{2A39C4BA-C60B-4B5E-9D71-9B0E1EC933B4}" type="slidenum">
+            <a:fld id="{0C0F6099-C57C-42F4-8FA4-140798F163F2}" type="slidenum">
               <a:rPr b="0" lang="en" sz="1000" strike="noStrike" u="none">
                 <a:solidFill>
                   <a:schemeClr val="dk2"/>
@@ -10612,7 +10612,7 @@
                 <a:tab algn="l" pos="0"/>
               </a:tabLst>
             </a:pPr>
-            <a:fld id="{8FFA08FC-7198-4FF7-B855-079E104B9600}" type="slidenum">
+            <a:fld id="{E897DF58-85E8-483C-9310-B7F55A8D24C2}" type="slidenum">
               <a:rPr b="0" lang="en" sz="1000" strike="noStrike" u="none">
                 <a:solidFill>
                   <a:schemeClr val="dk2"/>
@@ -11602,7 +11602,7 @@
                 <a:tab algn="l" pos="0"/>
               </a:tabLst>
             </a:pPr>
-            <a:fld id="{B615C722-29E8-4DDE-9AC2-056D1DCB67A3}" type="slidenum">
+            <a:fld id="{CB8BE93E-328E-4F53-BCAB-8F7A47AEC0AD}" type="slidenum">
               <a:rPr b="0" lang="en" sz="1000" strike="noStrike" u="none">
                 <a:solidFill>
                   <a:schemeClr val="dk2"/>
@@ -12592,7 +12592,7 @@
                 <a:tab algn="l" pos="0"/>
               </a:tabLst>
             </a:pPr>
-            <a:fld id="{F20C063D-445A-436F-86F0-7C47753EA293}" type="slidenum">
+            <a:fld id="{2963AF6A-8DD4-44BB-9F53-4D51EBE2EF03}" type="slidenum">
               <a:rPr b="0" lang="en" sz="1000" strike="noStrike" u="none">
                 <a:solidFill>
                   <a:schemeClr val="dk2"/>
@@ -13856,7 +13856,7 @@
                 <a:tab algn="l" pos="0"/>
               </a:tabLst>
             </a:pPr>
-            <a:fld id="{81BCB379-B15F-4840-9669-4CFA9CDBC96B}" type="slidenum">
+            <a:fld id="{068A906D-1FA0-4028-99A7-21C4FFE57A2E}" type="slidenum">
               <a:rPr b="0" lang="en" sz="1000" strike="noStrike" u="none">
                 <a:solidFill>
                   <a:schemeClr val="dk2"/>
@@ -15668,7 +15668,7 @@
                 <a:tab algn="l" pos="0"/>
               </a:tabLst>
             </a:pPr>
-            <a:fld id="{1CF4527B-E186-425A-A931-D958A53D4616}" type="slidenum">
+            <a:fld id="{1A260A97-19F5-4825-B363-E138D8FC5DCC}" type="slidenum">
               <a:rPr b="0" lang="en" sz="1000" strike="noStrike" u="none">
                 <a:solidFill>
                   <a:schemeClr val="dk2"/>
@@ -15777,7 +15777,7 @@
                 <a:tab algn="l" pos="0"/>
               </a:tabLst>
             </a:pPr>
-            <a:fld id="{E2E0F4E8-15A3-4011-A29E-09190019A0D9}" type="slidenum">
+            <a:fld id="{0DEFA7DA-B7F4-445A-A366-582802640B85}" type="slidenum">
               <a:rPr b="0" lang="en" sz="1000" strike="noStrike" u="none">
                 <a:solidFill>
                   <a:schemeClr val="dk2"/>
@@ -15945,7 +15945,7 @@
                 <a:tab algn="l" pos="0"/>
               </a:tabLst>
             </a:pPr>
-            <a:fld id="{889253AA-B579-413E-9145-1227EE8FF8F9}" type="slidenum">
+            <a:fld id="{5A216E26-BBCE-4A63-A8A0-A36E68000FDD}" type="slidenum">
               <a:rPr b="0" lang="en" sz="1000" strike="noStrike" u="none">
                 <a:solidFill>
                   <a:schemeClr val="dk2"/>
@@ -16387,7 +16387,7 @@
                 <a:tab algn="l" pos="0"/>
               </a:tabLst>
             </a:pPr>
-            <a:fld id="{D48DAF1C-7534-489F-8D93-0B7AF050C75E}" type="slidenum">
+            <a:fld id="{77074FB2-C7A0-4200-9E0D-4D19BE49487D}" type="slidenum">
               <a:rPr b="0" lang="en" sz="1000" strike="noStrike" u="none">
                 <a:solidFill>
                   <a:schemeClr val="dk2"/>
@@ -17103,7 +17103,7 @@
                 <a:tab algn="l" pos="0"/>
               </a:tabLst>
             </a:pPr>
-            <a:fld id="{AE2D0569-0C71-4BA1-A2D4-C028455C8BC6}" type="slidenum">
+            <a:fld id="{A622DE1A-60DF-4912-B795-5500D6DAEA5D}" type="slidenum">
               <a:rPr b="0" lang="en" sz="1000" strike="noStrike" u="none">
                 <a:solidFill>
                   <a:schemeClr val="dk2"/>
@@ -17271,7 +17271,7 @@
                 <a:tab algn="l" pos="0"/>
               </a:tabLst>
             </a:pPr>
-            <a:fld id="{94525457-CFD0-4EAD-A475-EE5F621BDC2E}" type="slidenum">
+            <a:fld id="{DFC76CE9-2FDB-46C5-A959-4B11190FB96D}" type="slidenum">
               <a:rPr b="0" lang="en" sz="1000" strike="noStrike" u="none">
                 <a:solidFill>
                   <a:schemeClr val="dk2"/>
@@ -17551,7 +17551,7 @@
                 <a:tab algn="l" pos="0"/>
               </a:tabLst>
             </a:pPr>
-            <a:fld id="{0D603556-185D-4A7C-988E-F1461004A565}" type="datetime5">
+            <a:fld id="{B8AD99DD-721A-4805-A97E-AF24EA9CC672}" type="datetime5">
               <a:rPr b="0" lang="en" sz="1200" strike="noStrike" u="none">
                 <a:solidFill>
                   <a:srgbClr val="2a2a2a"/>
@@ -17682,7 +17682,7 @@
                 <a:latin typeface="Inter ExtraBold"/>
                 <a:ea typeface="Inter ExtraBold"/>
               </a:rPr>
-              <a:t>Calentemos motores</a:t>
+              <a:t>Reflexiona</a:t>
             </a:r>
             <a:endParaRPr b="0" lang="es-MX" sz="4000" strike="noStrike" u="none">
               <a:solidFill>
@@ -17707,8 +17707,8 @@
         </p:blipFill>
         <p:spPr>
           <a:xfrm>
-            <a:off x="752400" y="1800000"/>
-            <a:ext cx="7707240" cy="2765520"/>
+            <a:off x="3960000" y="0"/>
+            <a:ext cx="5220000" cy="5220000"/>
           </a:xfrm>
           <a:prstGeom prst="rect">
             <a:avLst/>
